--- a/deliverable/中期答辩_F_深色科技风.pptx
+++ b/deliverable/中期答辩_F_深色科技风.pptx
@@ -361,7 +361,7 @@
             <a:pPr/>
             <a:r>
               <a:rPr lang="zh-CN" dirty="0"/>
-              <a:t>各位老师好，我汇报的题目是《基于深度学习的阿尔茨海默症患者与健康人群肠道微生物组中抗菌肽的差异性研究》。本次中期检查按导师意见，重点汇报研究思路与各项工作的完成程度。</a:t>
+              <a:t>各位老师好，我汇报的题目是《基于深度学习的阿尔茨海默症患者与健康人群肠道微生物组中抗菌肽的差异性研究》。本次中期检查重点汇报研究思路与各项工作的完成程度。</a:t>
             </a:r>
           </a:p>
         </p:txBody>
@@ -7618,7 +7618,7 @@
         <p:spPr>
           <a:xfrm>
             <a:off x="677418" y="6270308"/>
-            <a:ext cx="6236208" cy="322707"/>
+            <a:ext cx="4903470" cy="322707"/>
           </a:xfrm>
           <a:prstGeom prst="rect">
             <a:avLst/>
@@ -7644,7 +7644,7 @@
                 <a:ea typeface="Microsoft YaHei"/>
                 <a:cs typeface="Arial"/>
               </a:rPr>
-              <a:t>按导师意见，本次汇报重点说明研究思路与各项工作的完成程度</a:t>
+              <a:t>本次汇报重点说明研究思路与各项工作的完成程度</a:t>
             </a:r>
           </a:p>
         </p:txBody>

--- a/deliverable/中期答辩_F_深色科技风.pptx
+++ b/deliverable/中期答辩_F_深色科技风.pptx
@@ -481,7 +481,7 @@
             <a:pPr/>
             <a:r>
               <a:rPr lang="zh-CN" dirty="0"/>
-              <a:t>从进度上看，前五项任务已经全部完成，目前集中在机制关联分析与抑菌实验验证两件事上，论文撰写同步推进，整体进度与开题安排一致。</a:t>
+              <a:t>从进度上看，前五项任务已经全部完成，目前集中在 AD 特有肽与 AD 的关联分析和抑菌实验验证两件事上，论文撰写同步推进，整体进度与开题安排一致。</a:t>
             </a:r>
           </a:p>
         </p:txBody>
@@ -721,7 +721,7 @@
             <a:pPr/>
             <a:r>
               <a:rPr lang="zh-CN" dirty="0"/>
-              <a:t>预期成果包括：一套可复用的分析流程、健康人与各阶段特有的候选抗菌肽清单、机制关联的分析结果、抑菌活性的初步证据，以及一篇投稿论文与学位论文。</a:t>
+              <a:t>预期成果包括：一套可复用的分析流程、AD 特异性特有的候选抗菌肽清单、AD 特有肽与 AD 关联的分析结果、抑菌活性的初步证据，以及一篇投稿论文与学位论文。</a:t>
             </a:r>
           </a:p>
         </p:txBody>
@@ -1201,7 +1201,7 @@
             <a:pPr/>
             <a:r>
               <a:rPr lang="zh-CN" dirty="0"/>
-              <a:t>差异分析之后，引入宏蛋白组的表达证据做二次去重：只保留在蛋白层面真实存在并可检出的抗菌肽，再通过组内共有、组间特有的比较，得到健康人群特有与各疾病阶段特有的抗菌肽清单。这一步同样已经完成。</a:t>
+              <a:t>差异分析之后，引入宏蛋白组的表达证据做二次去重：只保留在蛋白层面真实存在并可检出的抗菌肽，再通过组内共有、组间特有的比较，筛出 AD 组特有（AD 特异性）的抗菌肽清单。这一步同样已经完成。</a:t>
             </a:r>
           </a:p>
         </p:txBody>
@@ -1261,7 +1261,7 @@
             <a:pPr/>
             <a:r>
               <a:rPr lang="zh-CN" dirty="0"/>
-              <a:t>接下来是与发病机制的关联分析。参照乙酰胆碱酯酶与 β-淀粉样肽复合物分子模拟研究的思路，从三个方向考察：与 Aβ 的相互作用、与 AChE 外周阴离子位点的结合，以及免疫与炎症通路。目前这一步正在进行。</a:t>
+              <a:t>接下来是 AD 特有肽与 AD 的关联分析。参照乙酰胆碱酯酶与 β-淀粉样肽复合物分子模拟研究的思路，按致病方向考察：是否促进 Aβ 成核与聚集、是否经 AChE 外周阴离子位点推动成核、是否经免疫与炎症通路放大神经炎症。这一步正在进行。</a:t>
             </a:r>
           </a:p>
         </p:txBody>
@@ -3052,7 +3052,7 @@
         <p:spPr>
           <a:xfrm>
             <a:off x="677418" y="5146358"/>
-            <a:ext cx="11345037" cy="322707"/>
+            <a:ext cx="11476634" cy="322707"/>
           </a:xfrm>
           <a:prstGeom prst="rect">
             <a:avLst/>
@@ -3078,7 +3078,7 @@
                 <a:ea typeface="Microsoft YaHei"/>
                 <a:cs typeface="Arial"/>
               </a:rPr>
-              <a:t>数据资源、短肽库、三模型共识预测、分阶段差异分析与宏蛋白组去重均已完成；当前处于机制关联与抑菌实验验证</a:t>
+              <a:t>数据资源、短肽库、三模型共识预测、分阶段差异分析与宏蛋白组去重均已完成；当前处于 AD 特有肽与 AD 的关联分</a:t>
             </a:r>
           </a:p>
         </p:txBody>
@@ -3092,7 +3092,7 @@
         <p:spPr>
           <a:xfrm>
             <a:off x="677418" y="5441632"/>
-            <a:ext cx="2682240" cy="322707"/>
+            <a:ext cx="4459224" cy="322707"/>
           </a:xfrm>
           <a:prstGeom prst="rect">
             <a:avLst/>
@@ -3118,7 +3118,7 @@
                 <a:ea typeface="Microsoft YaHei"/>
                 <a:cs typeface="Arial"/>
               </a:rPr>
-              <a:t>阶段，论文撰写同步推进。</a:t>
+              <a:t>析、抑菌实验验证阶段，论文撰写同步推进。</a:t>
             </a:r>
           </a:p>
         </p:txBody>
@@ -3176,7 +3176,7 @@
         <p:spPr>
           <a:xfrm>
             <a:off x="677418" y="6270308"/>
-            <a:ext cx="8013192" cy="322707"/>
+            <a:ext cx="9443496" cy="322707"/>
           </a:xfrm>
           <a:prstGeom prst="rect">
             <a:avLst/>
@@ -3202,7 +3202,7 @@
                 <a:ea typeface="Microsoft YaHei"/>
                 <a:cs typeface="Arial"/>
               </a:rPr>
-              <a:t>前五项已完成，机制关联分析与抑菌实验验证正在推进，整体进度与开题计划一致</a:t>
+              <a:t>前五项已完成，AD 特有肽与 AD 的关联分析与抑菌实验验证正在推进，整体进度与开题计划一致</a:t>
             </a:r>
           </a:p>
         </p:txBody>
@@ -3562,7 +3562,7 @@
         <p:spPr>
           <a:xfrm>
             <a:off x="925449" y="2211229"/>
-            <a:ext cx="7748535" cy="308039"/>
+            <a:ext cx="6003596" cy="308039"/>
           </a:xfrm>
           <a:prstGeom prst="rect">
             <a:avLst/>
@@ -3588,7 +3588,7 @@
                 <a:ea typeface="Microsoft YaHei"/>
                 <a:cs typeface="Arial"/>
               </a:rPr>
-              <a:t>完成特有抗菌肽与 Aβ 聚集、AChE 结合及炎症通路的关联分析，形成候选肽清单。</a:t>
+              <a:t>完成 AD 特有肽与 Aβ 聚集、AChE 结合及炎症通路的关联分析。</a:t>
             </a:r>
           </a:p>
         </p:txBody>
@@ -3766,7 +3766,7 @@
         <p:spPr>
           <a:xfrm>
             <a:off x="925449" y="3973354"/>
-            <a:ext cx="6396990" cy="308039"/>
+            <a:ext cx="6566347" cy="308039"/>
           </a:xfrm>
           <a:prstGeom prst="rect">
             <a:avLst/>
@@ -3792,7 +3792,7 @@
                 <a:ea typeface="Microsoft YaHei"/>
                 <a:cs typeface="Arial"/>
               </a:rPr>
-              <a:t>汇总候选抗菌肽、特有肽与验证结果，形成完整的图表与结论体系。</a:t>
+              <a:t>汇总 AD 特有肽、关联分析与验证结果，形成完整的图表与结论体系。</a:t>
             </a:r>
           </a:p>
         </p:txBody>
@@ -4746,7 +4746,7 @@
         <p:spPr>
           <a:xfrm>
             <a:off x="925449" y="5716429"/>
-            <a:ext cx="6641595" cy="308039"/>
+            <a:ext cx="7831107" cy="308039"/>
           </a:xfrm>
           <a:prstGeom prst="rect">
             <a:avLst/>
@@ -4772,7 +4772,7 @@
                 <a:ea typeface="Microsoft YaHei"/>
                 <a:cs typeface="Arial"/>
               </a:rPr>
-              <a:t>开题拟做功能与可视化分析 → 下一步进行机制关联分析与抑菌实验验证</a:t>
+              <a:t>开题拟做功能与可视化分析 → 下一步做 AD 特有肽与 AD 的关联分析与抑菌实验验证</a:t>
             </a:r>
           </a:p>
         </p:txBody>
@@ -5618,7 +5618,7 @@
         <p:spPr>
           <a:xfrm>
             <a:off x="925449" y="4821079"/>
-            <a:ext cx="8970655" cy="308039"/>
+            <a:ext cx="10766763" cy="308039"/>
           </a:xfrm>
           <a:prstGeom prst="rect">
             <a:avLst/>
@@ -5644,14 +5644,54 @@
                 <a:ea typeface="Microsoft YaHei"/>
                 <a:cs typeface="Arial"/>
               </a:rPr>
-              <a:t>应对：以分子对接与动力学模拟、文献比对为主，将研究定位为“线索发现”，不夸大因果结论。</a:t>
-            </a:r>
-          </a:p>
-        </p:txBody>
-      </p:sp>
-      <p:sp>
-        <p:nvSpPr>
-          <p:cNvPr id="22" name="Rectangle 22"/>
+              <a:t>应对：以分子对接与动力学模拟、文献比对为主，按致病方向检验 AD 特有肽是否推动 Aβ 聚集与神经炎症，将研究</a:t>
+            </a:r>
+          </a:p>
+        </p:txBody>
+      </p:sp>
+      <p:sp>
+        <p:nvSpPr>
+          <p:cNvPr id="22" name="TextBox 22"/>
+          <p:cNvSpPr txBox="1"/>
+          <p:nvPr/>
+        </p:nvSpPr>
+        <p:spPr>
+          <a:xfrm>
+            <a:off x="925449" y="5078254"/>
+            <a:ext cx="3653165" cy="308039"/>
+          </a:xfrm>
+          <a:prstGeom prst="rect">
+            <a:avLst/>
+          </a:prstGeom>
+          <a:noFill/>
+          <a:ln>
+            <a:noFill/>
+          </a:ln>
+        </p:spPr>
+        <p:txBody>
+          <a:bodyPr wrap="none" lIns="0" tIns="0" rIns="0" bIns="0" anchor="t" anchorCtr="0">
+            <a:spAutoFit/>
+          </a:bodyPr>
+          <a:lstStyle/>
+          <a:p>
+            <a:pPr algn="l"/>
+            <a:r>
+              <a:rPr lang="zh-CN" sz="1580" dirty="0">
+                <a:solidFill>
+                  <a:srgbClr val="CBD5E1"/>
+                </a:solidFill>
+                <a:latin typeface="Arial"/>
+                <a:ea typeface="Microsoft YaHei"/>
+                <a:cs typeface="Arial"/>
+              </a:rPr>
+              <a:t>定位为“线索发现”，不夸大因果结论。</a:t>
+            </a:r>
+          </a:p>
+        </p:txBody>
+      </p:sp>
+      <p:sp>
+        <p:nvSpPr>
+          <p:cNvPr id="23" name="Rectangle 23"/>
           <p:cNvSpPr/>
           <p:nvPr/>
         </p:nvSpPr>
@@ -5673,7 +5713,7 @@
       </p:sp>
       <p:sp>
         <p:nvSpPr>
-          <p:cNvPr id="23" name="Rectangle 23"/>
+          <p:cNvPr id="24" name="Rectangle 24"/>
           <p:cNvSpPr/>
           <p:nvPr/>
         </p:nvSpPr>
@@ -5695,7 +5735,7 @@
       </p:sp>
       <p:sp>
         <p:nvSpPr>
-          <p:cNvPr id="24" name="TextBox 24"/>
+          <p:cNvPr id="25" name="TextBox 25"/>
           <p:cNvSpPr txBox="1"/>
           <p:nvPr/>
         </p:nvSpPr>
@@ -6110,7 +6150,7 @@
         <p:spPr>
           <a:xfrm>
             <a:off x="906018" y="2022158"/>
-            <a:ext cx="6857314" cy="322707"/>
+            <a:ext cx="5676290" cy="322707"/>
           </a:xfrm>
           <a:prstGeom prst="rect">
             <a:avLst/>
@@ -6136,7 +6176,7 @@
                 <a:ea typeface="Microsoft YaHei"/>
                 <a:cs typeface="Arial"/>
               </a:rPr>
-              <a:t>健康人群与 AD 各阶段特有的候选抗菌肽清单，作为后续研究的线索集</a:t>
+              <a:t>AD 特异性特有的候选抗菌肽清单，作为后续研究的线索集</a:t>
             </a:r>
           </a:p>
         </p:txBody>
@@ -6172,7 +6212,7 @@
         <p:spPr>
           <a:xfrm>
             <a:off x="906018" y="2526982"/>
-            <a:ext cx="7755969" cy="322707"/>
+            <a:ext cx="7640298" cy="322707"/>
           </a:xfrm>
           <a:prstGeom prst="rect">
             <a:avLst/>
@@ -6198,7 +6238,7 @@
                 <a:ea typeface="Microsoft YaHei"/>
                 <a:cs typeface="Arial"/>
               </a:rPr>
-              <a:t>候选抗菌肽与 AD 发病机制关联的分析结果（Aβ 聚集、AChE 结合、炎症通路）</a:t>
+              <a:t>AD 特有肽与 AD 发病机制关联的分析结果（Aβ 聚集、AChE 结合、炎症通路）</a:t>
             </a:r>
           </a:p>
         </p:txBody>
@@ -8036,7 +8076,7 @@
         <p:spPr>
           <a:xfrm>
             <a:off x="677418" y="6270308"/>
-            <a:ext cx="9354260" cy="322707"/>
+            <a:ext cx="10996555" cy="322707"/>
           </a:xfrm>
           <a:prstGeom prst="rect">
             <a:avLst/>
@@ -8062,7 +8102,7 @@
                 <a:ea typeface="Microsoft YaHei"/>
                 <a:cs typeface="Arial"/>
               </a:rPr>
-              <a:t>主线：数据资源 → 短肽库 → 三模型共识预测 → 分阶段差异 → 去重筛选特有肽 → 机制关联与验证</a:t>
+              <a:t>主线：数据资源 → 短肽库 → 三模型共识预测 → 分阶段差异 → 去重筛选 AD 特有肽 → AD 特有肽与 AD 的关联分析</a:t>
             </a:r>
           </a:p>
         </p:txBody>
@@ -8874,7 +8914,7 @@
         <p:spPr>
           <a:xfrm>
             <a:off x="925068" y="5308282"/>
-            <a:ext cx="10961980" cy="322707"/>
+            <a:ext cx="10916717" cy="322707"/>
           </a:xfrm>
           <a:prstGeom prst="rect">
             <a:avLst/>
@@ -8900,7 +8940,7 @@
                 <a:ea typeface="Microsoft YaHei"/>
                 <a:cs typeface="Arial"/>
               </a:rPr>
-              <a:t>AD 患者与健康人群肠道微生物组所编码的抗菌肽是否存在差异？能否筛选出各阶段特有的抗菌肽，并与 AD 的发</a:t>
+              <a:t>AD 患者与健康人群肠道微生物组所编码的抗菌肽是否存在差异？能否筛出 AD 组特有的抗菌肽，并与 AD 的发病</a:t>
             </a:r>
           </a:p>
         </p:txBody>
@@ -8914,7 +8954,7 @@
         <p:spPr>
           <a:xfrm>
             <a:off x="925068" y="5594032"/>
-            <a:ext cx="1793748" cy="322707"/>
+            <a:ext cx="1571625" cy="322707"/>
           </a:xfrm>
           <a:prstGeom prst="rect">
             <a:avLst/>
@@ -8940,7 +8980,7 @@
                 <a:ea typeface="Microsoft YaHei"/>
                 <a:cs typeface="Arial"/>
               </a:rPr>
-              <a:t>病机制建立联系？</a:t>
+              <a:t>机制建立联系？</a:t>
             </a:r>
           </a:p>
         </p:txBody>
@@ -9285,7 +9325,7 @@
         <p:spPr>
           <a:xfrm>
             <a:off x="677799" y="1839754"/>
-            <a:ext cx="1930298" cy="308039"/>
+            <a:ext cx="6303633" cy="308039"/>
           </a:xfrm>
           <a:prstGeom prst="rect">
             <a:avLst/>
@@ -9311,7 +9351,7 @@
                 <a:ea typeface="Microsoft YaHei"/>
                 <a:cs typeface="Arial"/>
               </a:rPr>
-              <a:t>微生物基因组参考集</a:t>
+              <a:t>微生物基因组参考集（MetaBAT2 / MaxBin2 / CONCOCT 分箱，m</a:t>
             </a:r>
           </a:p>
         </p:txBody>
@@ -9324,7 +9364,47 @@
         </p:nvSpPr>
         <p:spPr>
           <a:xfrm>
-            <a:off x="677799" y="2277904"/>
+            <a:off x="677799" y="2125504"/>
+            <a:ext cx="1609271" cy="308039"/>
+          </a:xfrm>
+          <a:prstGeom prst="rect">
+            <a:avLst/>
+          </a:prstGeom>
+          <a:noFill/>
+          <a:ln>
+            <a:noFill/>
+          </a:ln>
+        </p:spPr>
+        <p:txBody>
+          <a:bodyPr wrap="none" lIns="0" tIns="0" rIns="0" bIns="0" anchor="t" anchorCtr="0">
+            <a:spAutoFit/>
+          </a:bodyPr>
+          <a:lstStyle/>
+          <a:p>
+            <a:pPr algn="l"/>
+            <a:r>
+              <a:rPr lang="zh-CN" sz="1580" dirty="0">
+                <a:solidFill>
+                  <a:srgbClr val="CBD5E1"/>
+                </a:solidFill>
+                <a:latin typeface="Arial"/>
+                <a:ea typeface="Microsoft YaHei"/>
+                <a:cs typeface="Arial"/>
+              </a:rPr>
+              <a:t>etaWRAP 提纯）</a:t>
+            </a:r>
+          </a:p>
+        </p:txBody>
+      </p:sp>
+      <p:sp>
+        <p:nvSpPr>
+          <p:cNvPr id="10" name="TextBox 10"/>
+          <p:cNvSpPr txBox="1"/>
+          <p:nvPr/>
+        </p:nvSpPr>
+        <p:spPr>
+          <a:xfrm>
+            <a:off x="677799" y="2554129"/>
             <a:ext cx="6142152" cy="308039"/>
           </a:xfrm>
           <a:prstGeom prst="rect">
@@ -9365,13 +9445,13 @@
       </p:sp>
       <p:sp>
         <p:nvSpPr>
-          <p:cNvPr id="10" name="TextBox 10"/>
-          <p:cNvSpPr txBox="1"/>
-          <p:nvPr/>
-        </p:nvSpPr>
-        <p:spPr>
-          <a:xfrm>
-            <a:off x="677799" y="2554129"/>
+          <p:cNvPr id="11" name="TextBox 11"/>
+          <p:cNvSpPr txBox="1"/>
+          <p:nvPr/>
+        </p:nvSpPr>
+        <p:spPr>
+          <a:xfrm>
+            <a:off x="677799" y="2839879"/>
             <a:ext cx="1504899" cy="308039"/>
           </a:xfrm>
           <a:prstGeom prst="rect">
@@ -9405,13 +9485,13 @@
       </p:sp>
       <p:sp>
         <p:nvSpPr>
-          <p:cNvPr id="11" name="TextBox 11"/>
-          <p:cNvSpPr txBox="1"/>
-          <p:nvPr/>
-        </p:nvSpPr>
-        <p:spPr>
-          <a:xfrm>
-            <a:off x="677799" y="2992279"/>
+          <p:cNvPr id="12" name="TextBox 12"/>
+          <p:cNvSpPr txBox="1"/>
+          <p:nvPr/>
+        </p:nvSpPr>
+        <p:spPr>
+          <a:xfrm>
+            <a:off x="677799" y="3268504"/>
             <a:ext cx="6142152" cy="308039"/>
           </a:xfrm>
           <a:prstGeom prst="rect">
@@ -9452,13 +9532,13 @@
       </p:sp>
       <p:sp>
         <p:nvSpPr>
-          <p:cNvPr id="12" name="TextBox 12"/>
-          <p:cNvSpPr txBox="1"/>
-          <p:nvPr/>
-        </p:nvSpPr>
-        <p:spPr>
-          <a:xfrm>
-            <a:off x="677799" y="3268504"/>
+          <p:cNvPr id="13" name="TextBox 13"/>
+          <p:cNvSpPr txBox="1"/>
+          <p:nvPr/>
+        </p:nvSpPr>
+        <p:spPr>
+          <a:xfrm>
+            <a:off x="677799" y="3544729"/>
             <a:ext cx="654101" cy="308039"/>
           </a:xfrm>
           <a:prstGeom prst="rect">
@@ -9492,13 +9572,13 @@
       </p:sp>
       <p:sp>
         <p:nvSpPr>
-          <p:cNvPr id="13" name="TextBox 13"/>
-          <p:cNvSpPr txBox="1"/>
-          <p:nvPr/>
-        </p:nvSpPr>
-        <p:spPr>
-          <a:xfrm>
-            <a:off x="677799" y="3697129"/>
+          <p:cNvPr id="14" name="TextBox 14"/>
+          <p:cNvSpPr txBox="1"/>
+          <p:nvPr/>
+        </p:nvSpPr>
+        <p:spPr>
+          <a:xfrm>
+            <a:off x="677799" y="3982879"/>
             <a:ext cx="6142152" cy="308039"/>
           </a:xfrm>
           <a:prstGeom prst="rect">
@@ -9539,13 +9619,13 @@
       </p:sp>
       <p:sp>
         <p:nvSpPr>
-          <p:cNvPr id="14" name="TextBox 14"/>
-          <p:cNvSpPr txBox="1"/>
-          <p:nvPr/>
-        </p:nvSpPr>
-        <p:spPr>
-          <a:xfrm>
-            <a:off x="677799" y="3982879"/>
+          <p:cNvPr id="15" name="TextBox 15"/>
+          <p:cNvSpPr txBox="1"/>
+          <p:nvPr/>
+        </p:nvSpPr>
+        <p:spPr>
+          <a:xfrm>
+            <a:off x="677799" y="4259104"/>
             <a:ext cx="441401" cy="308039"/>
           </a:xfrm>
           <a:prstGeom prst="rect">
@@ -9579,7 +9659,7 @@
       </p:sp>
       <p:sp>
         <p:nvSpPr>
-          <p:cNvPr id="15" name="Rectangle 15"/>
+          <p:cNvPr id="16" name="Rectangle 16"/>
           <p:cNvSpPr/>
           <p:nvPr/>
         </p:nvSpPr>
@@ -9605,7 +9685,7 @@
       </p:sp>
       <p:sp>
         <p:nvSpPr>
-          <p:cNvPr id="16" name="Rectangle 16"/>
+          <p:cNvPr id="17" name="Rectangle 17"/>
           <p:cNvSpPr/>
           <p:nvPr/>
         </p:nvSpPr>
@@ -9627,7 +9707,7 @@
       </p:sp>
       <p:sp>
         <p:nvSpPr>
-          <p:cNvPr id="17" name="TextBox 17"/>
+          <p:cNvPr id="18" name="TextBox 18"/>
           <p:cNvSpPr txBox="1"/>
           <p:nvPr/>
         </p:nvSpPr>
@@ -9667,7 +9747,7 @@
       </p:sp>
       <p:sp>
         <p:nvSpPr>
-          <p:cNvPr id="18" name="TextBox 18"/>
+          <p:cNvPr id="19" name="TextBox 19"/>
           <p:cNvSpPr txBox="1"/>
           <p:nvPr/>
         </p:nvSpPr>
@@ -9707,7 +9787,7 @@
       </p:sp>
       <p:sp>
         <p:nvSpPr>
-          <p:cNvPr id="19" name="Rectangle 19"/>
+          <p:cNvPr id="20" name="Rectangle 20"/>
           <p:cNvSpPr/>
           <p:nvPr/>
         </p:nvSpPr>
@@ -9733,7 +9813,7 @@
       </p:sp>
       <p:sp>
         <p:nvSpPr>
-          <p:cNvPr id="20" name="Rectangle 20"/>
+          <p:cNvPr id="21" name="Rectangle 21"/>
           <p:cNvSpPr/>
           <p:nvPr/>
         </p:nvSpPr>
@@ -9755,7 +9835,7 @@
       </p:sp>
       <p:sp>
         <p:nvSpPr>
-          <p:cNvPr id="21" name="TextBox 21"/>
+          <p:cNvPr id="22" name="TextBox 22"/>
           <p:cNvSpPr txBox="1"/>
           <p:nvPr/>
         </p:nvSpPr>
@@ -9795,7 +9875,7 @@
       </p:sp>
       <p:sp>
         <p:nvSpPr>
-          <p:cNvPr id="22" name="TextBox 22"/>
+          <p:cNvPr id="23" name="TextBox 23"/>
           <p:cNvSpPr txBox="1"/>
           <p:nvPr/>
         </p:nvSpPr>
@@ -9835,7 +9915,7 @@
       </p:sp>
       <p:sp>
         <p:nvSpPr>
-          <p:cNvPr id="23" name="Rectangle 23"/>
+          <p:cNvPr id="24" name="Rectangle 24"/>
           <p:cNvSpPr/>
           <p:nvPr/>
         </p:nvSpPr>
@@ -9861,7 +9941,7 @@
       </p:sp>
       <p:sp>
         <p:nvSpPr>
-          <p:cNvPr id="24" name="Rectangle 24"/>
+          <p:cNvPr id="25" name="Rectangle 25"/>
           <p:cNvSpPr/>
           <p:nvPr/>
         </p:nvSpPr>
@@ -9883,7 +9963,7 @@
       </p:sp>
       <p:sp>
         <p:nvSpPr>
-          <p:cNvPr id="25" name="TextBox 25"/>
+          <p:cNvPr id="26" name="TextBox 26"/>
           <p:cNvSpPr txBox="1"/>
           <p:nvPr/>
         </p:nvSpPr>
@@ -9923,7 +10003,7 @@
       </p:sp>
       <p:sp>
         <p:nvSpPr>
-          <p:cNvPr id="26" name="TextBox 26"/>
+          <p:cNvPr id="27" name="TextBox 27"/>
           <p:cNvSpPr txBox="1"/>
           <p:nvPr/>
         </p:nvSpPr>
@@ -9963,7 +10043,7 @@
       </p:sp>
       <p:sp>
         <p:nvSpPr>
-          <p:cNvPr id="27" name="Rectangle 27"/>
+          <p:cNvPr id="28" name="Rectangle 28"/>
           <p:cNvSpPr/>
           <p:nvPr/>
         </p:nvSpPr>
@@ -9989,7 +10069,7 @@
       </p:sp>
       <p:sp>
         <p:nvSpPr>
-          <p:cNvPr id="28" name="Rectangle 28"/>
+          <p:cNvPr id="29" name="Rectangle 29"/>
           <p:cNvSpPr/>
           <p:nvPr/>
         </p:nvSpPr>
@@ -10011,7 +10091,7 @@
       </p:sp>
       <p:sp>
         <p:nvSpPr>
-          <p:cNvPr id="29" name="TextBox 29"/>
+          <p:cNvPr id="30" name="TextBox 30"/>
           <p:cNvSpPr txBox="1"/>
           <p:nvPr/>
         </p:nvSpPr>
@@ -10051,7 +10131,7 @@
       </p:sp>
       <p:sp>
         <p:nvSpPr>
-          <p:cNvPr id="30" name="TextBox 30"/>
+          <p:cNvPr id="31" name="TextBox 31"/>
           <p:cNvSpPr txBox="1"/>
           <p:nvPr/>
         </p:nvSpPr>
@@ -10091,7 +10171,7 @@
       </p:sp>
       <p:sp>
         <p:nvSpPr>
-          <p:cNvPr id="31" name="Rectangle 31"/>
+          <p:cNvPr id="32" name="Rectangle 32"/>
           <p:cNvSpPr/>
           <p:nvPr/>
         </p:nvSpPr>
@@ -10113,7 +10193,7 @@
       </p:sp>
       <p:sp>
         <p:nvSpPr>
-          <p:cNvPr id="32" name="Rectangle 32"/>
+          <p:cNvPr id="33" name="Rectangle 33"/>
           <p:cNvSpPr/>
           <p:nvPr/>
         </p:nvSpPr>
@@ -10135,7 +10215,7 @@
       </p:sp>
       <p:sp>
         <p:nvSpPr>
-          <p:cNvPr id="33" name="TextBox 33"/>
+          <p:cNvPr id="34" name="TextBox 34"/>
           <p:cNvSpPr txBox="1"/>
           <p:nvPr/>
         </p:nvSpPr>
@@ -11138,7 +11218,7 @@
         <p:spPr>
           <a:xfrm>
             <a:off x="677418" y="6270308"/>
-            <a:ext cx="7346823" cy="322707"/>
+            <a:ext cx="8432124" cy="322707"/>
           </a:xfrm>
           <a:prstGeom prst="rect">
             <a:avLst/>
@@ -11164,7 +11244,7 @@
                 <a:ea typeface="Microsoft YaHei"/>
                 <a:cs typeface="Arial"/>
               </a:rPr>
-              <a:t>先得到随病程变化的候选抗菌肽，再用表达证据过滤，为特有肽筛选做准备</a:t>
+              <a:t>先得到随病程变化的候选抗菌肽，再用表达证据过滤，为 AD 特异性特有肽筛选做准备</a:t>
             </a:r>
           </a:p>
         </p:txBody>
@@ -11386,7 +11466,7 @@
         <p:spPr>
           <a:xfrm>
             <a:off x="670560" y="800100"/>
-            <a:ext cx="8107680" cy="586740"/>
+            <a:ext cx="10080955" cy="586740"/>
           </a:xfrm>
           <a:prstGeom prst="rect">
             <a:avLst/>
@@ -11412,7 +11492,7 @@
                 <a:ea typeface="Microsoft YaHei"/>
                 <a:cs typeface="Arial"/>
               </a:rPr>
-              <a:t>已完成：宏蛋白组二次去重，筛选特有抗菌肽</a:t>
+              <a:t>已完成：宏蛋白组二次去重，筛选 AD 特异性特有抗菌肽</a:t>
             </a:r>
           </a:p>
         </p:txBody>
@@ -11538,7 +11618,7 @@
                 <a:ea typeface="Microsoft YaHei"/>
                 <a:cs typeface="Arial"/>
               </a:rPr>
-              <a:t>在序列层面去冗余的基础上，引入宏蛋白组表达证据进行二次去重，只保留真实存在且被检出的抗菌肽，并据此区分</a:t>
+              <a:t>在序列层面去冗余的基础上，引入宏蛋白组表达证据进行二次去重，只保留真实存在且被检出的抗菌肽，并据此筛出</a:t>
             </a:r>
           </a:p>
         </p:txBody>
@@ -11552,7 +11632,7 @@
         <p:spPr>
           <a:xfrm>
             <a:off x="677418" y="5441632"/>
-            <a:ext cx="4237101" cy="322707"/>
+            <a:ext cx="3561512" cy="322707"/>
           </a:xfrm>
           <a:prstGeom prst="rect">
             <a:avLst/>
@@ -11578,7 +11658,7 @@
                 <a:ea typeface="Microsoft YaHei"/>
                 <a:cs typeface="Arial"/>
               </a:rPr>
-              <a:t>健康人群特有与各疾病阶段特有的抗菌肽。</a:t>
+              <a:t>AD 组特有（AD 特异性）的抗菌肽。</a:t>
             </a:r>
           </a:p>
         </p:txBody>
@@ -11884,7 +11964,7 @@
         <p:spPr>
           <a:xfrm>
             <a:off x="670560" y="800100"/>
-            <a:ext cx="6446215" cy="586740"/>
+            <a:ext cx="9092794" cy="586740"/>
           </a:xfrm>
           <a:prstGeom prst="rect">
             <a:avLst/>
@@ -11910,7 +11990,7 @@
                 <a:ea typeface="Microsoft YaHei"/>
                 <a:cs typeface="Arial"/>
               </a:rPr>
-              <a:t>下一步：与 AD 发病机制的关联分析</a:t>
+              <a:t>下一步：AD 特有肽与 AD 的关联分析（致病方向）</a:t>
             </a:r>
           </a:p>
         </p:txBody>
@@ -12010,7 +12090,7 @@
         <p:spPr>
           <a:xfrm>
             <a:off x="677418" y="5146358"/>
-            <a:ext cx="11421523" cy="322707"/>
+            <a:ext cx="11388204" cy="322707"/>
           </a:xfrm>
           <a:prstGeom prst="rect">
             <a:avLst/>
@@ -12036,7 +12116,7 @@
                 <a:ea typeface="Microsoft YaHei"/>
                 <a:cs typeface="Arial"/>
               </a:rPr>
-              <a:t>参照乙酰胆碱酯酶—β-淀粉样肽复合物分子模拟研究的思路，从三个方向考察特有抗菌肽与 AD 发病机制的关联：与 A</a:t>
+              <a:t>参照乙酰胆碱酯酶—β-淀粉样肽复合物分子模拟研究的思路，按致病方向考察 AD 特异性特有肽：与 Aβ 的相互作用是</a:t>
             </a:r>
           </a:p>
         </p:txBody>
@@ -12050,7 +12130,7 @@
         <p:spPr>
           <a:xfrm>
             <a:off x="677418" y="5441632"/>
-            <a:ext cx="7517606" cy="322707"/>
+            <a:ext cx="8883663" cy="322707"/>
           </a:xfrm>
           <a:prstGeom prst="rect">
             <a:avLst/>
@@ -12076,7 +12156,7 @@
                 <a:ea typeface="Microsoft YaHei"/>
                 <a:cs typeface="Arial"/>
               </a:rPr>
-              <a:t>β 的相互作用、与 AChE 外周阴离子位点的结合、以及免疫与炎症调节通路。</a:t>
+              <a:t>否促进成核与聚集、与 AChE 外周阴离子位点的结合是否推动成核、以及免疫与炎症通路。</a:t>
             </a:r>
           </a:p>
         </p:txBody>
@@ -12134,7 +12214,7 @@
         <p:spPr>
           <a:xfrm>
             <a:off x="677418" y="6270308"/>
-            <a:ext cx="6279752" cy="322707"/>
+            <a:ext cx="8740592" cy="322707"/>
           </a:xfrm>
           <a:prstGeom prst="rect">
             <a:avLst/>
@@ -12160,7 +12240,7 @@
                 <a:ea typeface="Microsoft YaHei"/>
                 <a:cs typeface="Arial"/>
               </a:rPr>
-              <a:t>关联分析的落点：从“差异肽”推进到“可能与 AD 病理相关的肽”</a:t>
+              <a:t>关联分析的落点：判断 AD 特有肽是否推动 Aβ 聚集与神经炎症，而不是去证明它抑制 AD</a:t>
             </a:r>
           </a:p>
         </p:txBody>
